--- a/presentation/task03/Task03_Planck_Einstein.pptx
+++ b/presentation/task03/Task03_Planck_Einstein.pptx
@@ -502,12 +502,10 @@
           <a:p>
             <a:r>
               <a:rPr lang="en-US" dirty="0"/>
-              <a:t>FINAL SCRIPT (approximately 17–18 seconds)
+              <a:t>FINAL SCRIPT
 Task 3 models Planck radiation and Einstein heat capacity. Increasing temperature moves the black-body peak to shorter wavelengths, while total emission follows T to the fourth. For solids, the Einstein temperature sets how quickly heat capacity rises towards three R. All twenty-seven analytical and numerical checks passed.
-CUES
-0–7 s: Planck spectrum and peak shift.
-7–14 s: Einstein curves and three-R limit.
-14–18 s: validation band.</a:t>
+MASTER-DECK CUE
+Follow model, validation evidence, then result.</a:t>
             </a:r>
             <a:endParaRPr lang="en-US" dirty="0"/>
           </a:p>
@@ -862,7 +860,7 @@
     <p:bg>
       <p:bgPr>
         <a:solidFill>
-          <a:srgbClr val="F7FAFC"/>
+          <a:srgbClr val="FFFFFF"/>
         </a:solidFill>
       </p:bgPr>
     </p:bg>
@@ -880,141 +878,9 @@
           <a:chExt cx="0" cy="0"/>
         </a:xfrm>
       </p:grpSpPr>
-      <p:sp>
-        <p:nvSpPr>
-          <p:cNvPr id="2" name="Text 0"/>
-          <p:cNvSpPr/>
-          <p:nvPr/>
-        </p:nvSpPr>
-        <p:spPr>
-          <a:xfrm>
-            <a:off x="475488" y="201168"/>
-            <a:ext cx="11247120" cy="438912"/>
-          </a:xfrm>
-          <a:prstGeom prst="rect">
-            <a:avLst/>
-          </a:prstGeom>
-          <a:noFill/>
-          <a:ln/>
-        </p:spPr>
-        <p:txBody>
-          <a:bodyPr wrap="square" lIns="0" tIns="0" rIns="0" bIns="0" rtlCol="0" anchor="ctr">
-            <a:normAutofit/>
-          </a:bodyPr>
-          <a:lstStyle/>
-          <a:p>
-            <a:pPr indent="0" marL="0">
-              <a:buNone/>
-            </a:pPr>
-            <a:r>
-              <a:rPr lang="en-US" sz="2800" b="1" dirty="0">
-                <a:solidFill>
-                  <a:srgbClr val="243447"/>
-                </a:solidFill>
-                <a:latin typeface="Arial" pitchFamily="34" charset="0"/>
-                <a:ea typeface="Arial" pitchFamily="34" charset="-122"/>
-                <a:cs typeface="Arial" pitchFamily="34" charset="-120"/>
-              </a:rPr>
-              <a:t>Task 3 — Thermal Radiation and Heat Capacity</a:t>
-            </a:r>
-            <a:endParaRPr lang="en-US" sz="2800" dirty="0"/>
-          </a:p>
-        </p:txBody>
-      </p:sp>
-      <p:sp>
-        <p:nvSpPr>
-          <p:cNvPr id="3" name="Text 1"/>
-          <p:cNvSpPr/>
-          <p:nvPr/>
-        </p:nvSpPr>
-        <p:spPr>
-          <a:xfrm>
-            <a:off x="493776" y="694944"/>
-            <a:ext cx="11064240" cy="256032"/>
-          </a:xfrm>
-          <a:prstGeom prst="rect">
-            <a:avLst/>
-          </a:prstGeom>
-          <a:noFill/>
-          <a:ln/>
-        </p:spPr>
-        <p:txBody>
-          <a:bodyPr wrap="square" lIns="0" tIns="0" rIns="0" bIns="0" rtlCol="0" anchor="ctr">
-            <a:normAutofit/>
-          </a:bodyPr>
-          <a:lstStyle/>
-          <a:p>
-            <a:pPr indent="0" marL="0">
-              <a:buNone/>
-            </a:pPr>
-            <a:r>
-              <a:rPr lang="en-US" sz="1650" b="1" dirty="0">
-                <a:solidFill>
-                  <a:srgbClr val="0072B2"/>
-                </a:solidFill>
-                <a:latin typeface="Arial" pitchFamily="34" charset="0"/>
-                <a:ea typeface="Arial" pitchFamily="34" charset="-122"/>
-                <a:cs typeface="Arial" pitchFamily="34" charset="-120"/>
-              </a:rPr>
-              <a:t>Hotter black bodies peak at shorter wavelengths; higher Tₑ delays the rise to 3R.</a:t>
-            </a:r>
-            <a:endParaRPr lang="en-US" sz="1650" dirty="0"/>
-          </a:p>
-        </p:txBody>
-      </p:sp>
-      <p:sp>
-        <p:nvSpPr>
-          <p:cNvPr id="4" name="Shape 2"/>
-          <p:cNvSpPr/>
-          <p:nvPr/>
-        </p:nvSpPr>
-        <p:spPr>
-          <a:xfrm>
-            <a:off x="475488" y="1024128"/>
-            <a:ext cx="11247120" cy="0"/>
-          </a:xfrm>
-          <a:prstGeom prst="line">
-            <a:avLst/>
-          </a:prstGeom>
-          <a:noFill/>
-          <a:ln w="28575">
-            <a:solidFill>
-              <a:srgbClr val="0072B2"/>
-            </a:solidFill>
-            <a:prstDash val="solid"/>
-          </a:ln>
-        </p:spPr>
-      </p:sp>
-      <p:sp>
-        <p:nvSpPr>
-          <p:cNvPr id="5" name="Shape 3"/>
-          <p:cNvSpPr/>
-          <p:nvPr/>
-        </p:nvSpPr>
-        <p:spPr>
-          <a:xfrm>
-            <a:off x="420624" y="1179576"/>
-            <a:ext cx="5596128" cy="3913632"/>
-          </a:xfrm>
-          <a:prstGeom prst="roundRect">
-            <a:avLst>
-              <a:gd name="adj" fmla="val 1168"/>
-            </a:avLst>
-          </a:prstGeom>
-          <a:solidFill>
-            <a:srgbClr val="FFFFFF"/>
-          </a:solidFill>
-          <a:ln w="12700">
-            <a:solidFill>
-              <a:srgbClr val="DCE3E8"/>
-            </a:solidFill>
-            <a:prstDash val="solid"/>
-          </a:ln>
-        </p:spPr>
-      </p:sp>
       <p:pic>
         <p:nvPicPr>
-          <p:cNvPr id="6" name="Image 0" descr="Planck spectral exitance from 100 to 3000 nanometres for 4000, 5000, and 6000 kelvin. The hotter curves are taller and peak at shorter wavelengths; the visible band and numerical peaks are marked.">    </p:cNvPr>
+          <p:cNvPr id="2" name="Image 0" descr="Task 3 summary comparing three Planck black-body spectra, seven Einstein heat-capacity curves, numerical errors against analytical laws and the universal normalized Einstein curve. All twenty-seven checks pass.">    </p:cNvPr>
           <p:cNvPicPr>
             <a:picLocks noChangeAspect="1"/>
           </p:cNvPicPr>
@@ -1028,491 +894,14 @@
         </p:blipFill>
         <p:spPr>
           <a:xfrm>
-            <a:off x="539496" y="1280160"/>
-            <a:ext cx="5358384" cy="3319272"/>
+            <a:off x="109728" y="73152"/>
+            <a:ext cx="11969496" cy="6729984"/>
           </a:xfrm>
           <a:prstGeom prst="rect">
             <a:avLst/>
           </a:prstGeom>
         </p:spPr>
       </p:pic>
-      <p:sp>
-        <p:nvSpPr>
-          <p:cNvPr id="7" name="Text 4"/>
-          <p:cNvSpPr/>
-          <p:nvPr/>
-        </p:nvSpPr>
-        <p:spPr>
-          <a:xfrm>
-            <a:off x="640080" y="4709160"/>
-            <a:ext cx="5157216" cy="228600"/>
-          </a:xfrm>
-          <a:prstGeom prst="rect">
-            <a:avLst/>
-          </a:prstGeom>
-          <a:noFill/>
-          <a:ln/>
-        </p:spPr>
-        <p:txBody>
-          <a:bodyPr wrap="square" lIns="0" tIns="0" rIns="0" bIns="0" rtlCol="0" anchor="ctr">
-            <a:normAutofit/>
-          </a:bodyPr>
-          <a:lstStyle/>
-          <a:p>
-            <a:pPr algn="ctr" indent="0" marL="0">
-              <a:buNone/>
-            </a:pPr>
-            <a:r>
-              <a:rPr lang="en-US" sz="1350" b="1" dirty="0">
-                <a:solidFill>
-                  <a:srgbClr val="0072B2"/>
-                </a:solidFill>
-                <a:latin typeface="Arial" pitchFamily="34" charset="0"/>
-                <a:ea typeface="Arial" pitchFamily="34" charset="-122"/>
-                <a:cs typeface="Arial" pitchFamily="34" charset="-120"/>
-              </a:rPr>
-              <a:t>Peak shifts 724 → 483 nm from 4000 → 6000 K</a:t>
-            </a:r>
-            <a:endParaRPr lang="en-US" sz="1350" dirty="0"/>
-          </a:p>
-        </p:txBody>
-      </p:sp>
-      <p:sp>
-        <p:nvSpPr>
-          <p:cNvPr id="8" name="Shape 5"/>
-          <p:cNvSpPr/>
-          <p:nvPr/>
-        </p:nvSpPr>
-        <p:spPr>
-          <a:xfrm>
-            <a:off x="6172200" y="1179576"/>
-            <a:ext cx="5596128" cy="3913632"/>
-          </a:xfrm>
-          <a:prstGeom prst="roundRect">
-            <a:avLst>
-              <a:gd name="adj" fmla="val 1168"/>
-            </a:avLst>
-          </a:prstGeom>
-          <a:solidFill>
-            <a:srgbClr val="FFFFFF"/>
-          </a:solidFill>
-          <a:ln w="12700">
-            <a:solidFill>
-              <a:srgbClr val="DCE3E8"/>
-            </a:solidFill>
-            <a:prstDash val="solid"/>
-          </a:ln>
-        </p:spPr>
-      </p:sp>
-      <p:pic>
-        <p:nvPicPr>
-          <p:cNvPr id="9" name="Image 1" descr="Einstein molar heat capacity from zero to 800 kelvin for seven official solids. Every curve rises from zero towards the dashed three-R Dulong–Petit limit, with carbon rising most slowly.">    </p:cNvPr>
-          <p:cNvPicPr>
-            <a:picLocks noChangeAspect="1"/>
-          </p:cNvPicPr>
-          <p:nvPr/>
-        </p:nvPicPr>
-        <p:blipFill>
-          <a:blip r:embed="rId2"/>
-          <a:stretch>
-            <a:fillRect/>
-          </a:stretch>
-        </p:blipFill>
-        <p:spPr>
-          <a:xfrm>
-            <a:off x="6291072" y="1280160"/>
-            <a:ext cx="5358384" cy="3319272"/>
-          </a:xfrm>
-          <a:prstGeom prst="rect">
-            <a:avLst/>
-          </a:prstGeom>
-        </p:spPr>
-      </p:pic>
-      <p:sp>
-        <p:nvSpPr>
-          <p:cNvPr id="10" name="Text 6"/>
-          <p:cNvSpPr/>
-          <p:nvPr/>
-        </p:nvSpPr>
-        <p:spPr>
-          <a:xfrm>
-            <a:off x="6391656" y="4709160"/>
-            <a:ext cx="5157216" cy="228600"/>
-          </a:xfrm>
-          <a:prstGeom prst="rect">
-            <a:avLst/>
-          </a:prstGeom>
-          <a:noFill/>
-          <a:ln/>
-        </p:spPr>
-        <p:txBody>
-          <a:bodyPr wrap="square" lIns="0" tIns="0" rIns="0" bIns="0" rtlCol="0" anchor="ctr">
-            <a:normAutofit/>
-          </a:bodyPr>
-          <a:lstStyle/>
-          <a:p>
-            <a:pPr algn="ctr" indent="0" marL="0">
-              <a:buNone/>
-            </a:pPr>
-            <a:r>
-              <a:rPr lang="en-US" sz="1350" b="1" dirty="0">
-                <a:solidFill>
-                  <a:srgbClr val="D55E00"/>
-                </a:solidFill>
-                <a:latin typeface="Arial" pitchFamily="34" charset="0"/>
-                <a:ea typeface="Arial" pitchFamily="34" charset="-122"/>
-                <a:cs typeface="Arial" pitchFamily="34" charset="-120"/>
-              </a:rPr>
-              <a:t>At 800 K: Au ≈ 3R; carbon remains below the limit</a:t>
-            </a:r>
-            <a:endParaRPr lang="en-US" sz="1350" dirty="0"/>
-          </a:p>
-        </p:txBody>
-      </p:sp>
-      <p:sp>
-        <p:nvSpPr>
-          <p:cNvPr id="11" name="Shape 7"/>
-          <p:cNvSpPr/>
-          <p:nvPr/>
-        </p:nvSpPr>
-        <p:spPr>
-          <a:xfrm>
-            <a:off x="420624" y="5257800"/>
-            <a:ext cx="11347704" cy="1069848"/>
-          </a:xfrm>
-          <a:prstGeom prst="roundRect">
-            <a:avLst>
-              <a:gd name="adj" fmla="val 4274"/>
-            </a:avLst>
-          </a:prstGeom>
-          <a:solidFill>
-            <a:srgbClr val="FFFFFF"/>
-          </a:solidFill>
-          <a:ln w="12700">
-            <a:solidFill>
-              <a:srgbClr val="DCE3E8"/>
-            </a:solidFill>
-            <a:prstDash val="solid"/>
-          </a:ln>
-        </p:spPr>
-      </p:sp>
-      <p:sp>
-        <p:nvSpPr>
-          <p:cNvPr id="12" name="Shape 8"/>
-          <p:cNvSpPr/>
-          <p:nvPr/>
-        </p:nvSpPr>
-        <p:spPr>
-          <a:xfrm>
-            <a:off x="658368" y="5440680"/>
-            <a:ext cx="2304288" cy="585216"/>
-          </a:xfrm>
-          <a:prstGeom prst="roundRect">
-            <a:avLst>
-              <a:gd name="adj" fmla="val 6250"/>
-            </a:avLst>
-          </a:prstGeom>
-          <a:solidFill>
-            <a:srgbClr val="E7F5ED"/>
-          </a:solidFill>
-          <a:ln w="12700">
-            <a:solidFill>
-              <a:srgbClr val="8ED1AC"/>
-            </a:solidFill>
-            <a:prstDash val="solid"/>
-          </a:ln>
-        </p:spPr>
-      </p:sp>
-      <p:sp>
-        <p:nvSpPr>
-          <p:cNvPr id="13" name="Text 9"/>
-          <p:cNvSpPr/>
-          <p:nvPr/>
-        </p:nvSpPr>
-        <p:spPr>
-          <a:xfrm>
-            <a:off x="768096" y="5568696"/>
-            <a:ext cx="2084832" cy="246888"/>
-          </a:xfrm>
-          <a:prstGeom prst="rect">
-            <a:avLst/>
-          </a:prstGeom>
-          <a:noFill/>
-          <a:ln/>
-        </p:spPr>
-        <p:txBody>
-          <a:bodyPr wrap="square" lIns="0" tIns="0" rIns="0" bIns="0" rtlCol="0" anchor="ctr">
-            <a:normAutofit/>
-          </a:bodyPr>
-          <a:lstStyle/>
-          <a:p>
-            <a:pPr algn="ctr" indent="0" marL="0">
-              <a:buNone/>
-            </a:pPr>
-            <a:r>
-              <a:rPr lang="en-US" sz="1550" b="1" dirty="0">
-                <a:solidFill>
-                  <a:srgbClr val="009E73"/>
-                </a:solidFill>
-                <a:latin typeface="Arial" pitchFamily="34" charset="0"/>
-                <a:ea typeface="Arial" pitchFamily="34" charset="-122"/>
-                <a:cs typeface="Arial" pitchFamily="34" charset="-120"/>
-              </a:rPr>
-              <a:t>27/27 CHECKS PASS</a:t>
-            </a:r>
-            <a:endParaRPr lang="en-US" sz="1550" dirty="0"/>
-          </a:p>
-        </p:txBody>
-      </p:sp>
-      <p:sp>
-        <p:nvSpPr>
-          <p:cNvPr id="14" name="Shape 10"/>
-          <p:cNvSpPr/>
-          <p:nvPr/>
-        </p:nvSpPr>
-        <p:spPr>
-          <a:xfrm>
-            <a:off x="3264408" y="5449824"/>
-            <a:ext cx="45720" cy="630936"/>
-          </a:xfrm>
-          <a:prstGeom prst="line">
-            <a:avLst/>
-          </a:prstGeom>
-          <a:noFill/>
-          <a:ln w="40640">
-            <a:solidFill>
-              <a:srgbClr val="0072B2"/>
-            </a:solidFill>
-            <a:prstDash val="solid"/>
-          </a:ln>
-        </p:spPr>
-      </p:sp>
-      <p:sp>
-        <p:nvSpPr>
-          <p:cNvPr id="15" name="Text 11"/>
-          <p:cNvSpPr/>
-          <p:nvPr/>
-        </p:nvSpPr>
-        <p:spPr>
-          <a:xfrm>
-            <a:off x="3438144" y="5422392"/>
-            <a:ext cx="3493008" cy="228600"/>
-          </a:xfrm>
-          <a:prstGeom prst="rect">
-            <a:avLst/>
-          </a:prstGeom>
-          <a:noFill/>
-          <a:ln/>
-        </p:spPr>
-        <p:txBody>
-          <a:bodyPr wrap="square" lIns="0" tIns="0" rIns="0" bIns="0" rtlCol="0" anchor="ctr">
-            <a:normAutofit/>
-          </a:bodyPr>
-          <a:lstStyle/>
-          <a:p>
-            <a:pPr indent="0" marL="0">
-              <a:buNone/>
-            </a:pPr>
-            <a:r>
-              <a:rPr lang="en-US" sz="1250" b="1" dirty="0">
-                <a:solidFill>
-                  <a:srgbClr val="6B7B8C"/>
-                </a:solidFill>
-                <a:latin typeface="Arial" pitchFamily="34" charset="0"/>
-                <a:ea typeface="Arial" pitchFamily="34" charset="-122"/>
-                <a:cs typeface="Arial" pitchFamily="34" charset="-120"/>
-              </a:rPr>
-              <a:t>PLANCK VALIDATION</a:t>
-            </a:r>
-            <a:endParaRPr lang="en-US" sz="1250" dirty="0"/>
-          </a:p>
-        </p:txBody>
-      </p:sp>
-      <p:sp>
-        <p:nvSpPr>
-          <p:cNvPr id="16" name="Text 12"/>
-          <p:cNvSpPr/>
-          <p:nvPr/>
-        </p:nvSpPr>
-        <p:spPr>
-          <a:xfrm>
-            <a:off x="3438144" y="5705856"/>
-            <a:ext cx="3493008" cy="292608"/>
-          </a:xfrm>
-          <a:prstGeom prst="rect">
-            <a:avLst/>
-          </a:prstGeom>
-          <a:noFill/>
-          <a:ln/>
-        </p:spPr>
-        <p:txBody>
-          <a:bodyPr wrap="square" lIns="0" tIns="0" rIns="0" bIns="0" rtlCol="0" anchor="ctr">
-            <a:normAutofit/>
-          </a:bodyPr>
-          <a:lstStyle/>
-          <a:p>
-            <a:pPr indent="0" marL="0">
-              <a:buNone/>
-            </a:pPr>
-            <a:r>
-              <a:rPr lang="en-US" sz="1750" b="1" dirty="0">
-                <a:solidFill>
-                  <a:srgbClr val="243447"/>
-                </a:solidFill>
-                <a:latin typeface="Arial" pitchFamily="34" charset="0"/>
-                <a:ea typeface="Arial" pitchFamily="34" charset="-122"/>
-                <a:cs typeface="Arial" pitchFamily="34" charset="-120"/>
-              </a:rPr>
-              <a:t>λₘₐₓT = b   •   M = σT⁴</a:t>
-            </a:r>
-            <a:endParaRPr lang="en-US" sz="1750" dirty="0"/>
-          </a:p>
-        </p:txBody>
-      </p:sp>
-      <p:sp>
-        <p:nvSpPr>
-          <p:cNvPr id="17" name="Shape 13"/>
-          <p:cNvSpPr/>
-          <p:nvPr/>
-        </p:nvSpPr>
-        <p:spPr>
-          <a:xfrm>
-            <a:off x="7333488" y="5449824"/>
-            <a:ext cx="45720" cy="630936"/>
-          </a:xfrm>
-          <a:prstGeom prst="line">
-            <a:avLst/>
-          </a:prstGeom>
-          <a:noFill/>
-          <a:ln w="40640">
-            <a:solidFill>
-              <a:srgbClr val="D55E00"/>
-            </a:solidFill>
-            <a:prstDash val="solid"/>
-          </a:ln>
-        </p:spPr>
-      </p:sp>
-      <p:sp>
-        <p:nvSpPr>
-          <p:cNvPr id="18" name="Text 14"/>
-          <p:cNvSpPr/>
-          <p:nvPr/>
-        </p:nvSpPr>
-        <p:spPr>
-          <a:xfrm>
-            <a:off x="7507224" y="5422392"/>
-            <a:ext cx="3493008" cy="228600"/>
-          </a:xfrm>
-          <a:prstGeom prst="rect">
-            <a:avLst/>
-          </a:prstGeom>
-          <a:noFill/>
-          <a:ln/>
-        </p:spPr>
-        <p:txBody>
-          <a:bodyPr wrap="square" lIns="0" tIns="0" rIns="0" bIns="0" rtlCol="0" anchor="ctr">
-            <a:normAutofit/>
-          </a:bodyPr>
-          <a:lstStyle/>
-          <a:p>
-            <a:pPr indent="0" marL="0">
-              <a:buNone/>
-            </a:pPr>
-            <a:r>
-              <a:rPr lang="en-US" sz="1250" b="1" dirty="0">
-                <a:solidFill>
-                  <a:srgbClr val="6B7B8C"/>
-                </a:solidFill>
-                <a:latin typeface="Arial" pitchFamily="34" charset="0"/>
-                <a:ea typeface="Arial" pitchFamily="34" charset="-122"/>
-                <a:cs typeface="Arial" pitchFamily="34" charset="-120"/>
-              </a:rPr>
-              <a:t>EINSTEIN VALIDATION</a:t>
-            </a:r>
-            <a:endParaRPr lang="en-US" sz="1250" dirty="0"/>
-          </a:p>
-        </p:txBody>
-      </p:sp>
-      <p:sp>
-        <p:nvSpPr>
-          <p:cNvPr id="19" name="Text 15"/>
-          <p:cNvSpPr/>
-          <p:nvPr/>
-        </p:nvSpPr>
-        <p:spPr>
-          <a:xfrm>
-            <a:off x="7507224" y="5705856"/>
-            <a:ext cx="3493008" cy="292608"/>
-          </a:xfrm>
-          <a:prstGeom prst="rect">
-            <a:avLst/>
-          </a:prstGeom>
-          <a:noFill/>
-          <a:ln/>
-        </p:spPr>
-        <p:txBody>
-          <a:bodyPr wrap="square" lIns="0" tIns="0" rIns="0" bIns="0" rtlCol="0" anchor="ctr">
-            <a:normAutofit/>
-          </a:bodyPr>
-          <a:lstStyle/>
-          <a:p>
-            <a:pPr indent="0" marL="0">
-              <a:buNone/>
-            </a:pPr>
-            <a:r>
-              <a:rPr lang="en-US" sz="1750" b="1" dirty="0">
-                <a:solidFill>
-                  <a:srgbClr val="243447"/>
-                </a:solidFill>
-                <a:latin typeface="Arial" pitchFamily="34" charset="0"/>
-                <a:ea typeface="Arial" pitchFamily="34" charset="-122"/>
-                <a:cs typeface="Arial" pitchFamily="34" charset="-120"/>
-              </a:rPr>
-              <a:t>0 ≤ Cᵥ ≤ 3R   •   universal vs T/Tₑ</a:t>
-            </a:r>
-            <a:endParaRPr lang="en-US" sz="1750" dirty="0"/>
-          </a:p>
-        </p:txBody>
-      </p:sp>
-      <p:sp>
-        <p:nvSpPr>
-          <p:cNvPr id="20" name="Text 16"/>
-          <p:cNvSpPr/>
-          <p:nvPr/>
-        </p:nvSpPr>
-        <p:spPr>
-          <a:xfrm>
-            <a:off x="8778240" y="6537960"/>
-            <a:ext cx="2926080" cy="146304"/>
-          </a:xfrm>
-          <a:prstGeom prst="rect">
-            <a:avLst/>
-          </a:prstGeom>
-          <a:noFill/>
-          <a:ln/>
-        </p:spPr>
-        <p:txBody>
-          <a:bodyPr wrap="square" lIns="0" tIns="0" rIns="0" bIns="0" rtlCol="0" anchor="ctr"/>
-          <a:lstStyle/>
-          <a:p>
-            <a:pPr algn="r" indent="0" marL="0">
-              <a:buNone/>
-            </a:pPr>
-            <a:r>
-              <a:rPr lang="en-US" sz="850" dirty="0">
-                <a:solidFill>
-                  <a:srgbClr val="6B7B8C"/>
-                </a:solidFill>
-                <a:latin typeface="Arial" pitchFamily="34" charset="0"/>
-                <a:ea typeface="Arial" pitchFamily="34" charset="-122"/>
-                <a:cs typeface="Arial" pitchFamily="34" charset="-120"/>
-              </a:rPr>
-              <a:t>BPhO Computational Challenge 2026</a:t>
-            </a:r>
-            <a:endParaRPr lang="en-US" sz="850" dirty="0"/>
-          </a:p>
-        </p:txBody>
-      </p:sp>
     </p:spTree>
   </p:cSld>
   <p:clrMapOvr>
@@ -1564,7 +953,7 @@
     </a:clrScheme>
     <a:fontScheme name="Office">
       <a:majorFont>
-        <a:latin typeface="Arial"/>
+        <a:latin typeface="Times New Roman"/>
         <a:ea typeface=""/>
         <a:cs typeface=""/>
         <a:font script="Jpan" typeface="游ゴシック Light"/>
@@ -1597,7 +986,7 @@
         <a:font script="Viet" typeface="Times New Roman"/>
         <a:font script="Uigh" typeface="Microsoft Uighur"/>
         <a:font script="Geor" typeface="Sylfaen"/>
-        <a:font script="Armn" typeface="Arial"/>
+        <a:font script="Armn" typeface="Times New Roman"/>
         <a:font script="Bugi" typeface="Leelawadee UI"/>
         <a:font script="Bopo" typeface="Microsoft JhengHei"/>
         <a:font script="Java" typeface="Javanese Text"/>
@@ -1616,15 +1005,15 @@
         <a:font script="Tfng" typeface="Ebrima"/>
       </a:majorFont>
       <a:minorFont>
-        <a:latin typeface="Arial"/>
+        <a:latin typeface="Times New Roman"/>
         <a:ea typeface=""/>
         <a:cs typeface=""/>
         <a:font script="Jpan" typeface="游ゴシック"/>
         <a:font script="Hang" typeface="맑은 고딕"/>
         <a:font script="Hans" typeface="等线"/>
         <a:font script="Hant" typeface="新細明體"/>
-        <a:font script="Arab" typeface="Arial"/>
-        <a:font script="Hebr" typeface="Arial"/>
+        <a:font script="Arab" typeface="Times New Roman"/>
+        <a:font script="Hebr" typeface="Times New Roman"/>
         <a:font script="Thai" typeface="Cordia New"/>
         <a:font script="Ethi" typeface="Nyala"/>
         <a:font script="Beng" typeface="Vrinda"/>
@@ -1646,10 +1035,10 @@
         <a:font script="Laoo" typeface="DokChampa"/>
         <a:font script="Sinh" typeface="Iskoola Pota"/>
         <a:font script="Mong" typeface="Mongolian Baiti"/>
-        <a:font script="Viet" typeface="Arial"/>
+        <a:font script="Viet" typeface="Times New Roman"/>
         <a:font script="Uigh" typeface="Microsoft Uighur"/>
         <a:font script="Geor" typeface="Sylfaen"/>
-        <a:font script="Armn" typeface="Arial"/>
+        <a:font script="Armn" typeface="Times New Roman"/>
         <a:font script="Bugi" typeface="Leelawadee UI"/>
         <a:font script="Bopo" typeface="Microsoft JhengHei"/>
         <a:font script="Java" typeface="Javanese Text"/>
